--- a/m3/diapositivos/sessao-07-m3-f15.pptx
+++ b/m3/diapositivos/sessao-07-m3-f15.pptx
@@ -2593,7 +2593,7 @@
               <a:buNone/>
             </a:pPr>
             <a:r>
-              <a:rPr lang="en-US" sz="2300" dirty="0">
+              <a:rPr lang="en-US" sz="2300" b="1" dirty="0">
                 <a:solidFill>
                   <a:srgbClr val="F2F0EA"/>
                 </a:solidFill>
@@ -2601,11 +2601,8 @@
                 <a:ea typeface="Georgia" pitchFamily="34" charset="-122"/>
                 <a:cs typeface="Georgia" pitchFamily="34" charset="-120"/>
               </a:rPr>
-              <a:t>Modalidade epistémica: grau de certeza (valor de certeza ou probabilidade: «talvez», «deve estar», «é certo que»).</a:t>
-            </a:r>
-            <a:endParaRPr lang="en-US" sz="2300" dirty="0"/>
-          </a:p>
-          <a:p>
+              <a:t>Modalidade epistémica</a:t>
+            </a:r>
             <a:pPr indent="0" marL="0">
               <a:lnSpc>
                 <a:spcPct val="120000"/>
@@ -2624,11 +2621,8 @@
                 <a:ea typeface="Georgia" pitchFamily="34" charset="-122"/>
                 <a:cs typeface="Georgia" pitchFamily="34" charset="-120"/>
               </a:rPr>
-              <a:t>Deôntica: obrigação ou permissão («tem de», «pode sair»); o pedido e a ordem também são deônticos.</a:t>
-            </a:r>
-            <a:endParaRPr lang="en-US" sz="2300" dirty="0"/>
-          </a:p>
-          <a:p>
+              <a:t>: grau de certeza (valor de certeza ou probabilidade: «talvez», «deve estar», «é certo que»). </a:t>
+            </a:r>
             <a:pPr indent="0" marL="0">
               <a:lnSpc>
                 <a:spcPct val="120000"/>
@@ -2639,7 +2633,7 @@
               <a:buNone/>
             </a:pPr>
             <a:r>
-              <a:rPr lang="en-US" sz="2300" dirty="0">
+              <a:rPr lang="en-US" sz="2300" b="1" dirty="0">
                 <a:solidFill>
                   <a:srgbClr val="F2F0EA"/>
                 </a:solidFill>
@@ -2647,7 +2641,67 @@
                 <a:ea typeface="Georgia" pitchFamily="34" charset="-122"/>
                 <a:cs typeface="Georgia" pitchFamily="34" charset="-120"/>
               </a:rPr>
-              <a:t>Apreciativa: avaliação ou emoção do locutor («Infelizmente», «Que belo!»).</a:t>
+              <a:t>Deôntica</a:t>
+            </a:r>
+            <a:pPr indent="0" marL="0">
+              <a:lnSpc>
+                <a:spcPct val="120000"/>
+              </a:lnSpc>
+              <a:spcAft>
+                <a:spcPts val="1000"/>
+              </a:spcAft>
+              <a:buNone/>
+            </a:pPr>
+            <a:r>
+              <a:rPr lang="en-US" sz="2300" dirty="0">
+                <a:solidFill>
+                  <a:srgbClr val="F2F0EA"/>
+                </a:solidFill>
+                <a:latin typeface="Georgia" pitchFamily="34" charset="0"/>
+                <a:ea typeface="Georgia" pitchFamily="34" charset="-122"/>
+                <a:cs typeface="Georgia" pitchFamily="34" charset="-120"/>
+              </a:rPr>
+              <a:t>: obrigação ou permissão («tem de», «pode sair»); o pedido e a ordem também são deônticos. </a:t>
+            </a:r>
+            <a:pPr indent="0" marL="0">
+              <a:lnSpc>
+                <a:spcPct val="120000"/>
+              </a:lnSpc>
+              <a:spcAft>
+                <a:spcPts val="1000"/>
+              </a:spcAft>
+              <a:buNone/>
+            </a:pPr>
+            <a:r>
+              <a:rPr lang="en-US" sz="2300" b="1" dirty="0">
+                <a:solidFill>
+                  <a:srgbClr val="F2F0EA"/>
+                </a:solidFill>
+                <a:latin typeface="Georgia" pitchFamily="34" charset="0"/>
+                <a:ea typeface="Georgia" pitchFamily="34" charset="-122"/>
+                <a:cs typeface="Georgia" pitchFamily="34" charset="-120"/>
+              </a:rPr>
+              <a:t>Apreciativa</a:t>
+            </a:r>
+            <a:pPr indent="0" marL="0">
+              <a:lnSpc>
+                <a:spcPct val="120000"/>
+              </a:lnSpc>
+              <a:spcAft>
+                <a:spcPts val="1000"/>
+              </a:spcAft>
+              <a:buNone/>
+            </a:pPr>
+            <a:r>
+              <a:rPr lang="en-US" sz="2300" dirty="0">
+                <a:solidFill>
+                  <a:srgbClr val="F2F0EA"/>
+                </a:solidFill>
+                <a:latin typeface="Georgia" pitchFamily="34" charset="0"/>
+                <a:ea typeface="Georgia" pitchFamily="34" charset="-122"/>
+                <a:cs typeface="Georgia" pitchFamily="34" charset="-120"/>
+              </a:rPr>
+              <a:t>: avaliação ou emoção do locutor («Infelizmente», «Que belo!»).</a:t>
             </a:r>
             <a:endParaRPr lang="en-US" sz="2300" dirty="0"/>
           </a:p>
@@ -3293,7 +3347,41 @@
                 <a:ea typeface="Arial" pitchFamily="34" charset="-122"/>
                 <a:cs typeface="Arial" pitchFamily="34" charset="-120"/>
               </a:rPr>
-              <a:t>Ficas a classificar orações em versos de Camões e a comparar étimos: «engenho», de ingeniu-, e pares divergentes como «cheio» e «pleno».</a:t>
+              <a:t>Ficas a classificar orações em versos de Camões e a comparar étimos: «engenho», de </a:t>
+            </a:r>
+            <a:pPr indent="0" marL="0">
+              <a:lnSpc>
+                <a:spcPct val="105000"/>
+              </a:lnSpc>
+              <a:buNone/>
+            </a:pPr>
+            <a:r>
+              <a:rPr lang="en-US" sz="2200" i="1" dirty="0">
+                <a:solidFill>
+                  <a:srgbClr val="F2F0EA"/>
+                </a:solidFill>
+                <a:latin typeface="Arial" pitchFamily="34" charset="0"/>
+                <a:ea typeface="Arial" pitchFamily="34" charset="-122"/>
+                <a:cs typeface="Arial" pitchFamily="34" charset="-120"/>
+              </a:rPr>
+              <a:t>ingeniu-</a:t>
+            </a:r>
+            <a:pPr indent="0" marL="0">
+              <a:lnSpc>
+                <a:spcPct val="105000"/>
+              </a:lnSpc>
+              <a:buNone/>
+            </a:pPr>
+            <a:r>
+              <a:rPr lang="en-US" sz="2200" dirty="0">
+                <a:solidFill>
+                  <a:srgbClr val="F2F0EA"/>
+                </a:solidFill>
+                <a:latin typeface="Arial" pitchFamily="34" charset="0"/>
+                <a:ea typeface="Arial" pitchFamily="34" charset="-122"/>
+                <a:cs typeface="Arial" pitchFamily="34" charset="-120"/>
+              </a:rPr>
+              <a:t>, e pares divergentes como «cheio» e «pleno».</a:t>
             </a:r>
             <a:endParaRPr lang="en-US" sz="2200" dirty="0"/>
           </a:p>
@@ -3772,7 +3860,7 @@
                           <a:ea typeface="Arial" pitchFamily="34" charset="-122"/>
                           <a:cs typeface="Arial" pitchFamily="34" charset="-120"/>
                         </a:rPr>
-                        <a:t>«Roga a Deus, que teus anos encurtou» (Alma minha gentil)</a:t>
+                        <a:t>«Roga a Deus, que teus anos encurtou» («Alma minha gentil»)</a:t>
                       </a:r>
                       <a:endParaRPr lang="en-US" sz="1800" dirty="0">
                         <a:latin typeface="Arial" charset="0"/>
@@ -4076,7 +4164,7 @@
                           <a:ea typeface="Arial" pitchFamily="34" charset="-122"/>
                           <a:cs typeface="Arial" pitchFamily="34" charset="-120"/>
                         </a:rPr>
-                        <a:t>«Oh! quem tanto pudesse» (Erros meus)</a:t>
+                        <a:t>«Oh! quem tanto pudesse» («Erros meus»)</a:t>
                       </a:r>
                       <a:endParaRPr lang="en-US" sz="1800" dirty="0">
                         <a:latin typeface="Arial" charset="0"/>
@@ -4380,7 +4468,7 @@
                           <a:ea typeface="Arial" pitchFamily="34" charset="-122"/>
                           <a:cs typeface="Arial" pitchFamily="34" charset="-120"/>
                         </a:rPr>
-                        <a:t>«É força que viva» (Aquela cativa)</a:t>
+                        <a:t>«É força que viva» («Aquela cativa»)</a:t>
                       </a:r>
                       <a:endParaRPr lang="en-US" sz="1800" dirty="0">
                         <a:latin typeface="Arial" charset="0"/>
@@ -4832,7 +4920,75 @@
                 <a:ea typeface="Georgia" pitchFamily="34" charset="-122"/>
                 <a:cs typeface="Georgia" pitchFamily="34" charset="-120"/>
               </a:rPr>
-              <a:t>Como figura, a anáfora é a repetição de uma palavra no início de versos seguidos («Este… Este… Este…», VIII, 98). Como processo de retoma, é o que uma palavra faz quando aponta para outra que veio antes: em «Este rende munidas fortalezas», «Este» retoma «o dinheiro». Um pronome, um demonstrativo, uma repetição ou um sinónimo podem retomar.</a:t>
+              <a:t>Como </a:t>
+            </a:r>
+            <a:pPr indent="0" marL="0">
+              <a:lnSpc>
+                <a:spcPct val="120000"/>
+              </a:lnSpc>
+              <a:buNone/>
+            </a:pPr>
+            <a:r>
+              <a:rPr lang="en-US" sz="2300" b="1" dirty="0">
+                <a:solidFill>
+                  <a:srgbClr val="F2F0EA"/>
+                </a:solidFill>
+                <a:latin typeface="Georgia" pitchFamily="34" charset="0"/>
+                <a:ea typeface="Georgia" pitchFamily="34" charset="-122"/>
+                <a:cs typeface="Georgia" pitchFamily="34" charset="-120"/>
+              </a:rPr>
+              <a:t>figura</a:t>
+            </a:r>
+            <a:pPr indent="0" marL="0">
+              <a:lnSpc>
+                <a:spcPct val="120000"/>
+              </a:lnSpc>
+              <a:buNone/>
+            </a:pPr>
+            <a:r>
+              <a:rPr lang="en-US" sz="2300" dirty="0">
+                <a:solidFill>
+                  <a:srgbClr val="F2F0EA"/>
+                </a:solidFill>
+                <a:latin typeface="Georgia" pitchFamily="34" charset="0"/>
+                <a:ea typeface="Georgia" pitchFamily="34" charset="-122"/>
+                <a:cs typeface="Georgia" pitchFamily="34" charset="-120"/>
+              </a:rPr>
+              <a:t>, a anáfora é a repetição de uma palavra no início de versos seguidos («Este… Este… Este…», VIII, 98). Como </a:t>
+            </a:r>
+            <a:pPr indent="0" marL="0">
+              <a:lnSpc>
+                <a:spcPct val="120000"/>
+              </a:lnSpc>
+              <a:buNone/>
+            </a:pPr>
+            <a:r>
+              <a:rPr lang="en-US" sz="2300" b="1" dirty="0">
+                <a:solidFill>
+                  <a:srgbClr val="F2F0EA"/>
+                </a:solidFill>
+                <a:latin typeface="Georgia" pitchFamily="34" charset="0"/>
+                <a:ea typeface="Georgia" pitchFamily="34" charset="-122"/>
+                <a:cs typeface="Georgia" pitchFamily="34" charset="-120"/>
+              </a:rPr>
+              <a:t>processo de retoma</a:t>
+            </a:r>
+            <a:pPr indent="0" marL="0">
+              <a:lnSpc>
+                <a:spcPct val="120000"/>
+              </a:lnSpc>
+              <a:buNone/>
+            </a:pPr>
+            <a:r>
+              <a:rPr lang="en-US" sz="2300" dirty="0">
+                <a:solidFill>
+                  <a:srgbClr val="F2F0EA"/>
+                </a:solidFill>
+                <a:latin typeface="Georgia" pitchFamily="34" charset="0"/>
+                <a:ea typeface="Georgia" pitchFamily="34" charset="-122"/>
+                <a:cs typeface="Georgia" pitchFamily="34" charset="-120"/>
+              </a:rPr>
+              <a:t>, é o que uma palavra faz quando aponta para outra que veio antes: em «Este rende munidas fortalezas», «Este» retoma «o dinheiro». Um pronome, um demonstrativo, uma repetição ou um sinónimo podem retomar.</a:t>
             </a:r>
             <a:endParaRPr lang="en-US" sz="2300" dirty="0"/>
           </a:p>
@@ -6881,7 +7037,41 @@
                 <a:ea typeface="Arial" pitchFamily="34" charset="-122"/>
                 <a:cs typeface="Arial" pitchFamily="34" charset="-120"/>
               </a:rPr>
-              <a:t>«Este», «nela», «ali» e «desta ilha» retomam o que veio antes; «cheio» e «pleno», do mesmo plenu-, mostram as duas vias por onde o latim chegou ao português.</a:t>
+              <a:t>«Este», «nela», «ali» e «desta ilha» retomam o que veio antes; «cheio» e «pleno», do mesmo </a:t>
+            </a:r>
+            <a:pPr indent="0" marL="0">
+              <a:lnSpc>
+                <a:spcPct val="105000"/>
+              </a:lnSpc>
+              <a:buNone/>
+            </a:pPr>
+            <a:r>
+              <a:rPr lang="en-US" sz="2200" i="1" dirty="0">
+                <a:solidFill>
+                  <a:srgbClr val="F2F0EA"/>
+                </a:solidFill>
+                <a:latin typeface="Arial" pitchFamily="34" charset="0"/>
+                <a:ea typeface="Arial" pitchFamily="34" charset="-122"/>
+                <a:cs typeface="Arial" pitchFamily="34" charset="-120"/>
+              </a:rPr>
+              <a:t>plenu-</a:t>
+            </a:r>
+            <a:pPr indent="0" marL="0">
+              <a:lnSpc>
+                <a:spcPct val="105000"/>
+              </a:lnSpc>
+              <a:buNone/>
+            </a:pPr>
+            <a:r>
+              <a:rPr lang="en-US" sz="2200" dirty="0">
+                <a:solidFill>
+                  <a:srgbClr val="F2F0EA"/>
+                </a:solidFill>
+                <a:latin typeface="Arial" pitchFamily="34" charset="0"/>
+                <a:ea typeface="Arial" pitchFamily="34" charset="-122"/>
+                <a:cs typeface="Arial" pitchFamily="34" charset="-120"/>
+              </a:rPr>
+              <a:t>, mostram as duas vias por onde o latim chegou ao português.</a:t>
             </a:r>
             <a:endParaRPr lang="en-US" sz="2200" dirty="0"/>
           </a:p>

--- a/m3/diapositivos/sessao-07-m3-f15.pptx
+++ b/m3/diapositivos/sessao-07-m3-f15.pptx
@@ -15,9 +15,10 @@
     <p:sldId id="263" r:id="rId9"/>
     <p:sldId id="264" r:id="rId10"/>
     <p:sldId id="265" r:id="rId11"/>
+    <p:sldId id="266" r:id="rId12"/>
   </p:sldIdLst>
   <p:notesMasterIdLst>
-    <p:notesMasterId r:id="rId12"/>
+    <p:notesMasterId r:id="rId13"/>
   </p:notesMasterIdLst>
   <p:sldSz cx="12192000" cy="6858000"/>
   <p:notesSz cx="6858000" cy="12192000"/>
@@ -1436,6 +1437,663 @@
                 <a:cs typeface="Arial" pitchFamily="34" charset="-120"/>
               </a:rPr>
               <a:t>10</a:t>
+            </a:r>
+            <a:endParaRPr lang="en-US" sz="1000" dirty="0"/>
+          </a:p>
+        </p:txBody>
+      </p:sp>
+      <p:sp>
+        <p:nvSpPr>
+          <p:cNvPr id="6" name="Shape 3"/>
+          <p:cNvSpPr/>
+          <p:nvPr/>
+        </p:nvSpPr>
+        <p:spPr>
+          <a:xfrm>
+            <a:off x="822960" y="502920"/>
+            <a:ext cx="201168" cy="201168"/>
+          </a:xfrm>
+          <a:prstGeom prst="triangle">
+            <a:avLst/>
+          </a:prstGeom>
+          <a:ln w="19050">
+            <a:solidFill>
+              <a:srgbClr val="F2F0EA"/>
+            </a:solidFill>
+            <a:prstDash val="solid"/>
+          </a:ln>
+        </p:spPr>
+      </p:sp>
+      <p:sp>
+        <p:nvSpPr>
+          <p:cNvPr id="7" name="Text 4"/>
+          <p:cNvSpPr/>
+          <p:nvPr/>
+        </p:nvSpPr>
+        <p:spPr>
+          <a:xfrm>
+            <a:off x="1188720" y="457200"/>
+            <a:ext cx="9448495" cy="292608"/>
+          </a:xfrm>
+          <a:prstGeom prst="rect">
+            <a:avLst/>
+          </a:prstGeom>
+          <a:noFill/>
+          <a:ln/>
+        </p:spPr>
+        <p:txBody>
+          <a:bodyPr wrap="square" lIns="0" tIns="0" rIns="0" bIns="0" rtlCol="0" anchor="ctr"/>
+          <a:lstStyle/>
+          <a:p>
+            <a:pPr indent="0" marL="0">
+              <a:buNone/>
+            </a:pPr>
+            <a:r>
+              <a:rPr lang="en-US" sz="1100" b="1" spc="250" kern="0" dirty="0">
+                <a:solidFill>
+                  <a:srgbClr val="A9A79F"/>
+                </a:solidFill>
+                <a:latin typeface="Arial" pitchFamily="34" charset="0"/>
+                <a:ea typeface="Arial" pitchFamily="34" charset="-122"/>
+                <a:cs typeface="Arial" pitchFamily="34" charset="-120"/>
+              </a:rPr>
+              <a:t>SÍNTESE</a:t>
+            </a:r>
+            <a:endParaRPr lang="en-US" sz="1100" dirty="0"/>
+          </a:p>
+        </p:txBody>
+      </p:sp>
+      <p:sp>
+        <p:nvSpPr>
+          <p:cNvPr id="8" name="Text 5"/>
+          <p:cNvSpPr/>
+          <p:nvPr/>
+        </p:nvSpPr>
+        <p:spPr>
+          <a:xfrm>
+            <a:off x="822960" y="868680"/>
+            <a:ext cx="9814255" cy="822960"/>
+          </a:xfrm>
+          <a:prstGeom prst="rect">
+            <a:avLst/>
+          </a:prstGeom>
+          <a:noFill/>
+          <a:ln/>
+        </p:spPr>
+        <p:txBody>
+          <a:bodyPr wrap="square" lIns="0" tIns="0" rIns="0" bIns="0" rtlCol="0" anchor="b">
+            <a:normAutofit/>
+          </a:bodyPr>
+          <a:lstStyle/>
+          <a:p>
+            <a:pPr indent="0" marL="0">
+              <a:buNone/>
+            </a:pPr>
+            <a:r>
+              <a:rPr lang="en-US" sz="3400" dirty="0">
+                <a:solidFill>
+                  <a:srgbClr val="F2F0EA"/>
+                </a:solidFill>
+                <a:latin typeface="Arial" pitchFamily="34" charset="0"/>
+                <a:ea typeface="Arial" pitchFamily="34" charset="-122"/>
+                <a:cs typeface="Arial" pitchFamily="34" charset="-120"/>
+              </a:rPr>
+              <a:t>Para fixar</a:t>
+            </a:r>
+            <a:endParaRPr lang="en-US" sz="3400" dirty="0"/>
+          </a:p>
+        </p:txBody>
+      </p:sp>
+      <p:sp>
+        <p:nvSpPr>
+          <p:cNvPr id="9" name="Shape 6"/>
+          <p:cNvSpPr/>
+          <p:nvPr/>
+        </p:nvSpPr>
+        <p:spPr>
+          <a:xfrm>
+            <a:off x="822960" y="1746504"/>
+            <a:ext cx="640080" cy="64008"/>
+          </a:xfrm>
+          <a:prstGeom prst="rect">
+            <a:avLst/>
+          </a:prstGeom>
+          <a:solidFill>
+            <a:srgbClr val="E4555C"/>
+          </a:solidFill>
+          <a:ln w="12700">
+            <a:solidFill>
+              <a:srgbClr val="E4555C"/>
+            </a:solidFill>
+            <a:prstDash val="solid"/>
+          </a:ln>
+        </p:spPr>
+      </p:sp>
+      <p:sp>
+        <p:nvSpPr>
+          <p:cNvPr id="10" name="Shape 7"/>
+          <p:cNvSpPr/>
+          <p:nvPr/>
+        </p:nvSpPr>
+        <p:spPr>
+          <a:xfrm>
+            <a:off x="1005840" y="2286000"/>
+            <a:ext cx="0" cy="2788412"/>
+          </a:xfrm>
+          <a:prstGeom prst="line">
+            <a:avLst/>
+          </a:prstGeom>
+          <a:noFill/>
+          <a:ln w="12700">
+            <a:solidFill>
+              <a:srgbClr val="A9A79F"/>
+            </a:solidFill>
+            <a:prstDash val="solid"/>
+          </a:ln>
+        </p:spPr>
+      </p:sp>
+      <p:sp>
+        <p:nvSpPr>
+          <p:cNvPr id="11" name="Shape 8"/>
+          <p:cNvSpPr/>
+          <p:nvPr/>
+        </p:nvSpPr>
+        <p:spPr>
+          <a:xfrm>
+            <a:off x="822960" y="2103120"/>
+            <a:ext cx="365760" cy="365760"/>
+          </a:xfrm>
+          <a:prstGeom prst="ellipse">
+            <a:avLst/>
+          </a:prstGeom>
+          <a:solidFill>
+            <a:srgbClr val="111111"/>
+          </a:solidFill>
+          <a:ln w="15875">
+            <a:solidFill>
+              <a:srgbClr val="F2F0EA"/>
+            </a:solidFill>
+            <a:prstDash val="solid"/>
+          </a:ln>
+        </p:spPr>
+      </p:sp>
+      <p:sp>
+        <p:nvSpPr>
+          <p:cNvPr id="12" name="Text 9"/>
+          <p:cNvSpPr/>
+          <p:nvPr/>
+        </p:nvSpPr>
+        <p:spPr>
+          <a:xfrm>
+            <a:off x="822960" y="2103120"/>
+            <a:ext cx="365760" cy="365760"/>
+          </a:xfrm>
+          <a:prstGeom prst="rect">
+            <a:avLst/>
+          </a:prstGeom>
+          <a:noFill/>
+          <a:ln/>
+        </p:spPr>
+        <p:txBody>
+          <a:bodyPr wrap="square" lIns="0" tIns="0" rIns="0" bIns="0" rtlCol="0" anchor="ctr"/>
+          <a:lstStyle/>
+          <a:p>
+            <a:pPr algn="ctr" indent="0" marL="0">
+              <a:buNone/>
+            </a:pPr>
+            <a:r>
+              <a:rPr lang="en-US" sz="1300" b="1" dirty="0">
+                <a:solidFill>
+                  <a:srgbClr val="F2F0EA"/>
+                </a:solidFill>
+                <a:latin typeface="Arial" pitchFamily="34" charset="0"/>
+                <a:ea typeface="Arial" pitchFamily="34" charset="-122"/>
+                <a:cs typeface="Arial" pitchFamily="34" charset="-120"/>
+              </a:rPr>
+              <a:t>1</a:t>
+            </a:r>
+            <a:endParaRPr lang="en-US" sz="1300" dirty="0"/>
+          </a:p>
+        </p:txBody>
+      </p:sp>
+      <p:sp>
+        <p:nvSpPr>
+          <p:cNvPr id="13" name="Text 10"/>
+          <p:cNvSpPr/>
+          <p:nvPr/>
+        </p:nvSpPr>
+        <p:spPr>
+          <a:xfrm>
+            <a:off x="1417320" y="2112264"/>
+            <a:ext cx="9174175" cy="1223772"/>
+          </a:xfrm>
+          <a:prstGeom prst="rect">
+            <a:avLst/>
+          </a:prstGeom>
+          <a:noFill/>
+          <a:ln/>
+        </p:spPr>
+        <p:txBody>
+          <a:bodyPr wrap="square" lIns="0" tIns="0" rIns="0" bIns="0" rtlCol="0" anchor="t">
+            <a:normAutofit/>
+          </a:bodyPr>
+          <a:lstStyle/>
+          <a:p>
+            <a:pPr indent="0" marL="0">
+              <a:lnSpc>
+                <a:spcPct val="105000"/>
+              </a:lnSpc>
+              <a:buNone/>
+            </a:pPr>
+            <a:r>
+              <a:rPr lang="en-US" sz="2200" dirty="0">
+                <a:solidFill>
+                  <a:srgbClr val="F2F0EA"/>
+                </a:solidFill>
+                <a:latin typeface="Arial" pitchFamily="34" charset="0"/>
+                <a:ea typeface="Arial" pitchFamily="34" charset="-122"/>
+                <a:cs typeface="Arial" pitchFamily="34" charset="-120"/>
+              </a:rPr>
+              <a:t>Para classificar a modalidade, pergunta o que faz quem fala: mede a certeza, obriga ou pede, avalia; a marca é um advérbio, um verbo modal, um modo ou uma exclamação.</a:t>
+            </a:r>
+            <a:endParaRPr lang="en-US" sz="2200" dirty="0"/>
+          </a:p>
+        </p:txBody>
+      </p:sp>
+      <p:sp>
+        <p:nvSpPr>
+          <p:cNvPr id="14" name="Shape 11"/>
+          <p:cNvSpPr/>
+          <p:nvPr/>
+        </p:nvSpPr>
+        <p:spPr>
+          <a:xfrm>
+            <a:off x="822960" y="3326892"/>
+            <a:ext cx="365760" cy="365760"/>
+          </a:xfrm>
+          <a:prstGeom prst="ellipse">
+            <a:avLst/>
+          </a:prstGeom>
+          <a:solidFill>
+            <a:srgbClr val="111111"/>
+          </a:solidFill>
+          <a:ln w="15875">
+            <a:solidFill>
+              <a:srgbClr val="F2F0EA"/>
+            </a:solidFill>
+            <a:prstDash val="solid"/>
+          </a:ln>
+        </p:spPr>
+      </p:sp>
+      <p:sp>
+        <p:nvSpPr>
+          <p:cNvPr id="15" name="Text 12"/>
+          <p:cNvSpPr/>
+          <p:nvPr/>
+        </p:nvSpPr>
+        <p:spPr>
+          <a:xfrm>
+            <a:off x="822960" y="3326892"/>
+            <a:ext cx="365760" cy="365760"/>
+          </a:xfrm>
+          <a:prstGeom prst="rect">
+            <a:avLst/>
+          </a:prstGeom>
+          <a:noFill/>
+          <a:ln/>
+        </p:spPr>
+        <p:txBody>
+          <a:bodyPr wrap="square" lIns="0" tIns="0" rIns="0" bIns="0" rtlCol="0" anchor="ctr"/>
+          <a:lstStyle/>
+          <a:p>
+            <a:pPr algn="ctr" indent="0" marL="0">
+              <a:buNone/>
+            </a:pPr>
+            <a:r>
+              <a:rPr lang="en-US" sz="1300" b="1" dirty="0">
+                <a:solidFill>
+                  <a:srgbClr val="F2F0EA"/>
+                </a:solidFill>
+                <a:latin typeface="Arial" pitchFamily="34" charset="0"/>
+                <a:ea typeface="Arial" pitchFamily="34" charset="-122"/>
+                <a:cs typeface="Arial" pitchFamily="34" charset="-120"/>
+              </a:rPr>
+              <a:t>2</a:t>
+            </a:r>
+            <a:endParaRPr lang="en-US" sz="1300" dirty="0"/>
+          </a:p>
+        </p:txBody>
+      </p:sp>
+      <p:sp>
+        <p:nvSpPr>
+          <p:cNvPr id="16" name="Text 13"/>
+          <p:cNvSpPr/>
+          <p:nvPr/>
+        </p:nvSpPr>
+        <p:spPr>
+          <a:xfrm>
+            <a:off x="1417320" y="3336036"/>
+            <a:ext cx="9174175" cy="1564640"/>
+          </a:xfrm>
+          <a:prstGeom prst="rect">
+            <a:avLst/>
+          </a:prstGeom>
+          <a:noFill/>
+          <a:ln/>
+        </p:spPr>
+        <p:txBody>
+          <a:bodyPr wrap="square" lIns="0" tIns="0" rIns="0" bIns="0" rtlCol="0" anchor="t">
+            <a:normAutofit/>
+          </a:bodyPr>
+          <a:lstStyle/>
+          <a:p>
+            <a:pPr indent="0" marL="0">
+              <a:lnSpc>
+                <a:spcPct val="105000"/>
+              </a:lnSpc>
+              <a:buNone/>
+            </a:pPr>
+            <a:r>
+              <a:rPr lang="en-US" sz="2200" dirty="0">
+                <a:solidFill>
+                  <a:srgbClr val="F2F0EA"/>
+                </a:solidFill>
+                <a:latin typeface="Arial" pitchFamily="34" charset="0"/>
+                <a:ea typeface="Arial" pitchFamily="34" charset="-122"/>
+                <a:cs typeface="Arial" pitchFamily="34" charset="-120"/>
+              </a:rPr>
+              <a:t>Um verbo conjugado, uma oração: «quem não sabe arte» é substantiva relativa e sujeito; «Que já coberto foi de neve fria» é adjetiva relativa explicativa; «servia a ela» é coordenada adversativa.</a:t>
+            </a:r>
+            <a:endParaRPr lang="en-US" sz="2200" dirty="0"/>
+          </a:p>
+        </p:txBody>
+      </p:sp>
+      <p:sp>
+        <p:nvSpPr>
+          <p:cNvPr id="17" name="Shape 14"/>
+          <p:cNvSpPr/>
+          <p:nvPr/>
+        </p:nvSpPr>
+        <p:spPr>
+          <a:xfrm>
+            <a:off x="822960" y="4891532"/>
+            <a:ext cx="365760" cy="365760"/>
+          </a:xfrm>
+          <a:prstGeom prst="ellipse">
+            <a:avLst/>
+          </a:prstGeom>
+          <a:solidFill>
+            <a:srgbClr val="111111"/>
+          </a:solidFill>
+          <a:ln w="15875">
+            <a:solidFill>
+              <a:srgbClr val="F2F0EA"/>
+            </a:solidFill>
+            <a:prstDash val="solid"/>
+          </a:ln>
+        </p:spPr>
+      </p:sp>
+      <p:sp>
+        <p:nvSpPr>
+          <p:cNvPr id="18" name="Text 15"/>
+          <p:cNvSpPr/>
+          <p:nvPr/>
+        </p:nvSpPr>
+        <p:spPr>
+          <a:xfrm>
+            <a:off x="822960" y="4891532"/>
+            <a:ext cx="365760" cy="365760"/>
+          </a:xfrm>
+          <a:prstGeom prst="rect">
+            <a:avLst/>
+          </a:prstGeom>
+          <a:noFill/>
+          <a:ln/>
+        </p:spPr>
+        <p:txBody>
+          <a:bodyPr wrap="square" lIns="0" tIns="0" rIns="0" bIns="0" rtlCol="0" anchor="ctr"/>
+          <a:lstStyle/>
+          <a:p>
+            <a:pPr algn="ctr" indent="0" marL="0">
+              <a:buNone/>
+            </a:pPr>
+            <a:r>
+              <a:rPr lang="en-US" sz="1300" b="1" dirty="0">
+                <a:solidFill>
+                  <a:srgbClr val="F2F0EA"/>
+                </a:solidFill>
+                <a:latin typeface="Arial" pitchFamily="34" charset="0"/>
+                <a:ea typeface="Arial" pitchFamily="34" charset="-122"/>
+                <a:cs typeface="Arial" pitchFamily="34" charset="-120"/>
+              </a:rPr>
+              <a:t>3</a:t>
+            </a:r>
+            <a:endParaRPr lang="en-US" sz="1300" dirty="0"/>
+          </a:p>
+        </p:txBody>
+      </p:sp>
+      <p:sp>
+        <p:nvSpPr>
+          <p:cNvPr id="19" name="Text 16"/>
+          <p:cNvSpPr/>
+          <p:nvPr/>
+        </p:nvSpPr>
+        <p:spPr>
+          <a:xfrm>
+            <a:off x="1417320" y="4900676"/>
+            <a:ext cx="9174175" cy="1223772"/>
+          </a:xfrm>
+          <a:prstGeom prst="rect">
+            <a:avLst/>
+          </a:prstGeom>
+          <a:noFill/>
+          <a:ln/>
+        </p:spPr>
+        <p:txBody>
+          <a:bodyPr wrap="square" lIns="0" tIns="0" rIns="0" bIns="0" rtlCol="0" anchor="t">
+            <a:normAutofit/>
+          </a:bodyPr>
+          <a:lstStyle/>
+          <a:p>
+            <a:pPr indent="0" marL="0">
+              <a:lnSpc>
+                <a:spcPct val="105000"/>
+              </a:lnSpc>
+              <a:buNone/>
+            </a:pPr>
+            <a:r>
+              <a:rPr lang="en-US" sz="2200" dirty="0">
+                <a:solidFill>
+                  <a:srgbClr val="F2F0EA"/>
+                </a:solidFill>
+                <a:latin typeface="Arial" pitchFamily="34" charset="0"/>
+                <a:ea typeface="Arial" pitchFamily="34" charset="-122"/>
+                <a:cs typeface="Arial" pitchFamily="34" charset="-120"/>
+              </a:rPr>
+              <a:t>«Este», «nela», «ali» e «desta ilha» retomam o que veio antes; «cheio» e «pleno», do mesmo </a:t>
+            </a:r>
+            <a:pPr indent="0" marL="0">
+              <a:lnSpc>
+                <a:spcPct val="105000"/>
+              </a:lnSpc>
+              <a:buNone/>
+            </a:pPr>
+            <a:r>
+              <a:rPr lang="en-US" sz="2200" i="1" dirty="0">
+                <a:solidFill>
+                  <a:srgbClr val="F2F0EA"/>
+                </a:solidFill>
+                <a:latin typeface="Arial" pitchFamily="34" charset="0"/>
+                <a:ea typeface="Arial" pitchFamily="34" charset="-122"/>
+                <a:cs typeface="Arial" pitchFamily="34" charset="-120"/>
+              </a:rPr>
+              <a:t>plenu-</a:t>
+            </a:r>
+            <a:pPr indent="0" marL="0">
+              <a:lnSpc>
+                <a:spcPct val="105000"/>
+              </a:lnSpc>
+              <a:buNone/>
+            </a:pPr>
+            <a:r>
+              <a:rPr lang="en-US" sz="2200" dirty="0">
+                <a:solidFill>
+                  <a:srgbClr val="F2F0EA"/>
+                </a:solidFill>
+                <a:latin typeface="Arial" pitchFamily="34" charset="0"/>
+                <a:ea typeface="Arial" pitchFamily="34" charset="-122"/>
+                <a:cs typeface="Arial" pitchFamily="34" charset="-120"/>
+              </a:rPr>
+              <a:t>, mostram as duas vias por onde o latim chegou ao português.</a:t>
+            </a:r>
+            <a:endParaRPr lang="en-US" sz="2200" dirty="0"/>
+          </a:p>
+        </p:txBody>
+      </p:sp>
+    </p:spTree>
+  </p:cSld>
+  <p:clrMapOvr>
+    <a:masterClrMapping/>
+  </p:clrMapOvr>
+</p:sld>
+</file>
+
+<file path=ppt/slides/slide11.xml><?xml version="1.0" encoding="utf-8"?>
+<p:sld xmlns:a="http://schemas.openxmlformats.org/drawingml/2006/main" xmlns:r="http://schemas.openxmlformats.org/officeDocument/2006/relationships" xmlns:p="http://schemas.openxmlformats.org/presentationml/2006/main">
+  <p:cSld name="Slide 11">
+    <p:bg>
+      <p:bgPr>
+        <a:solidFill>
+          <a:srgbClr val="111111"/>
+        </a:solidFill>
+      </p:bgPr>
+    </p:bg>
+    <p:spTree>
+      <p:nvGrpSpPr>
+        <p:cNvPr id="1" name=""/>
+        <p:cNvGrpSpPr/>
+        <p:nvPr/>
+      </p:nvGrpSpPr>
+      <p:grpSpPr>
+        <a:xfrm>
+          <a:off x="0" y="0"/>
+          <a:ext cx="0" cy="0"/>
+          <a:chOff x="0" y="0"/>
+          <a:chExt cx="0" cy="0"/>
+        </a:xfrm>
+      </p:grpSpPr>
+      <p:sp>
+        <p:nvSpPr>
+          <p:cNvPr id="3" name="Text 0"/>
+          <p:cNvSpPr/>
+          <p:nvPr/>
+        </p:nvSpPr>
+        <p:spPr>
+          <a:xfrm>
+            <a:off x="10637215" y="384048"/>
+            <a:ext cx="731520" cy="365760"/>
+          </a:xfrm>
+          <a:prstGeom prst="rect">
+            <a:avLst/>
+          </a:prstGeom>
+          <a:noFill/>
+          <a:ln/>
+        </p:spPr>
+        <p:txBody>
+          <a:bodyPr wrap="square" lIns="0" tIns="0" rIns="0" bIns="0" rtlCol="0" anchor="ctr"/>
+          <a:lstStyle/>
+          <a:p>
+            <a:pPr algn="r" indent="0" marL="0">
+              <a:buNone/>
+            </a:pPr>
+            <a:r>
+              <a:rPr lang="en-US" sz="1200" b="1" spc="300" kern="0" dirty="0">
+                <a:solidFill>
+                  <a:srgbClr val="A9A79F"/>
+                </a:solidFill>
+                <a:latin typeface="Arial" pitchFamily="34" charset="0"/>
+                <a:ea typeface="Arial" pitchFamily="34" charset="-122"/>
+                <a:cs typeface="Arial" pitchFamily="34" charset="-120"/>
+              </a:rPr>
+              <a:t>EPI</a:t>
+            </a:r>
+            <a:endParaRPr lang="en-US" sz="1200" dirty="0"/>
+          </a:p>
+        </p:txBody>
+      </p:sp>
+      <p:sp>
+        <p:nvSpPr>
+          <p:cNvPr id="4" name="Text 1"/>
+          <p:cNvSpPr/>
+          <p:nvPr/>
+        </p:nvSpPr>
+        <p:spPr>
+          <a:xfrm>
+            <a:off x="822960" y="6400800"/>
+            <a:ext cx="9631375" cy="274320"/>
+          </a:xfrm>
+          <a:prstGeom prst="rect">
+            <a:avLst/>
+          </a:prstGeom>
+          <a:noFill/>
+          <a:ln/>
+        </p:spPr>
+        <p:txBody>
+          <a:bodyPr wrap="square" lIns="0" tIns="0" rIns="0" bIns="0" rtlCol="0" anchor="ctr"/>
+          <a:lstStyle/>
+          <a:p>
+            <a:pPr indent="0" marL="0">
+              <a:buNone/>
+            </a:pPr>
+            <a:r>
+              <a:rPr lang="en-US" sz="1000" dirty="0">
+                <a:solidFill>
+                  <a:srgbClr val="A9A79F"/>
+                </a:solidFill>
+                <a:latin typeface="Arial" pitchFamily="34" charset="0"/>
+                <a:ea typeface="Arial" pitchFamily="34" charset="-122"/>
+                <a:cs typeface="Arial" pitchFamily="34" charset="-120"/>
+              </a:rPr>
+              <a:t>Lição M3-F15, Poder, dever, querer</a:t>
+            </a:r>
+            <a:endParaRPr lang="en-US" sz="1000" dirty="0"/>
+          </a:p>
+        </p:txBody>
+      </p:sp>
+      <p:sp>
+        <p:nvSpPr>
+          <p:cNvPr id="5" name="Text 2"/>
+          <p:cNvSpPr/>
+          <p:nvPr/>
+        </p:nvSpPr>
+        <p:spPr>
+          <a:xfrm>
+            <a:off x="10637215" y="6400800"/>
+            <a:ext cx="731520" cy="274320"/>
+          </a:xfrm>
+          <a:prstGeom prst="rect">
+            <a:avLst/>
+          </a:prstGeom>
+          <a:noFill/>
+          <a:ln/>
+        </p:spPr>
+        <p:txBody>
+          <a:bodyPr wrap="square" lIns="0" tIns="0" rIns="0" bIns="0" rtlCol="0" anchor="ctr"/>
+          <a:lstStyle/>
+          <a:p>
+            <a:pPr algn="r" indent="0" marL="0">
+              <a:buNone/>
+            </a:pPr>
+            <a:r>
+              <a:rPr lang="en-US" sz="1000" dirty="0">
+                <a:solidFill>
+                  <a:srgbClr val="A9A79F"/>
+                </a:solidFill>
+                <a:latin typeface="Arial" pitchFamily="34" charset="0"/>
+                <a:ea typeface="Arial" pitchFamily="34" charset="-122"/>
+                <a:cs typeface="Arial" pitchFamily="34" charset="-120"/>
+              </a:rPr>
+              <a:t>11</a:t>
             </a:r>
             <a:endParaRPr lang="en-US" sz="1000" dirty="0"/>
           </a:p>
@@ -6624,7 +7282,7 @@
                 <a:ea typeface="Arial" pitchFamily="34" charset="-122"/>
                 <a:cs typeface="Arial" pitchFamily="34" charset="-120"/>
               </a:rPr>
-              <a:t>SÍNTESE</a:t>
+              <a:t>NO ATLAS LUSÓFONO (OPCIONAL)</a:t>
             </a:r>
             <a:endParaRPr lang="en-US" sz="1100" dirty="0"/>
           </a:p>
@@ -6665,7 +7323,7 @@
                 <a:ea typeface="Arial" pitchFamily="34" charset="-122"/>
                 <a:cs typeface="Arial" pitchFamily="34" charset="-120"/>
               </a:rPr>
-              <a:t>Para fixar</a:t>
+              <a:t>José Luiz Tavares, Cabo Verde</a:t>
             </a:r>
             <a:endParaRPr lang="en-US" sz="3400" dirty="0"/>
           </a:p>
@@ -6698,101 +7356,14 @@
       </p:sp>
       <p:sp>
         <p:nvSpPr>
-          <p:cNvPr id="10" name="Shape 7"/>
-          <p:cNvSpPr/>
-          <p:nvPr/>
-        </p:nvSpPr>
-        <p:spPr>
-          <a:xfrm>
-            <a:off x="1005840" y="2286000"/>
-            <a:ext cx="0" cy="2788412"/>
-          </a:xfrm>
-          <a:prstGeom prst="line">
-            <a:avLst/>
-          </a:prstGeom>
-          <a:noFill/>
-          <a:ln w="12700">
-            <a:solidFill>
-              <a:srgbClr val="A9A79F"/>
-            </a:solidFill>
-            <a:prstDash val="solid"/>
-          </a:ln>
-        </p:spPr>
-      </p:sp>
-      <p:sp>
-        <p:nvSpPr>
-          <p:cNvPr id="11" name="Shape 8"/>
-          <p:cNvSpPr/>
-          <p:nvPr/>
-        </p:nvSpPr>
-        <p:spPr>
-          <a:xfrm>
-            <a:off x="822960" y="2103120"/>
-            <a:ext cx="365760" cy="365760"/>
-          </a:xfrm>
-          <a:prstGeom prst="ellipse">
-            <a:avLst/>
-          </a:prstGeom>
-          <a:solidFill>
-            <a:srgbClr val="111111"/>
-          </a:solidFill>
-          <a:ln w="15875">
-            <a:solidFill>
-              <a:srgbClr val="F2F0EA"/>
-            </a:solidFill>
-            <a:prstDash val="solid"/>
-          </a:ln>
-        </p:spPr>
-      </p:sp>
-      <p:sp>
-        <p:nvSpPr>
-          <p:cNvPr id="12" name="Text 9"/>
-          <p:cNvSpPr/>
-          <p:nvPr/>
-        </p:nvSpPr>
-        <p:spPr>
-          <a:xfrm>
-            <a:off x="822960" y="2103120"/>
-            <a:ext cx="365760" cy="365760"/>
-          </a:xfrm>
-          <a:prstGeom prst="rect">
-            <a:avLst/>
-          </a:prstGeom>
-          <a:noFill/>
-          <a:ln/>
-        </p:spPr>
-        <p:txBody>
-          <a:bodyPr wrap="square" lIns="0" tIns="0" rIns="0" bIns="0" rtlCol="0" anchor="ctr"/>
-          <a:lstStyle/>
-          <a:p>
-            <a:pPr algn="ctr" indent="0" marL="0">
-              <a:buNone/>
-            </a:pPr>
-            <a:r>
-              <a:rPr lang="en-US" sz="1300" b="1" dirty="0">
-                <a:solidFill>
-                  <a:srgbClr val="F2F0EA"/>
-                </a:solidFill>
-                <a:latin typeface="Arial" pitchFamily="34" charset="0"/>
-                <a:ea typeface="Arial" pitchFamily="34" charset="-122"/>
-                <a:cs typeface="Arial" pitchFamily="34" charset="-120"/>
-              </a:rPr>
-              <a:t>1</a:t>
-            </a:r>
-            <a:endParaRPr lang="en-US" sz="1300" dirty="0"/>
-          </a:p>
-        </p:txBody>
-      </p:sp>
-      <p:sp>
-        <p:nvSpPr>
-          <p:cNvPr id="13" name="Text 10"/>
-          <p:cNvSpPr/>
-          <p:nvPr/>
-        </p:nvSpPr>
-        <p:spPr>
-          <a:xfrm>
-            <a:off x="1417320" y="2112264"/>
-            <a:ext cx="9174175" cy="1223772"/>
+          <p:cNvPr id="10" name="Text 7"/>
+          <p:cNvSpPr/>
+          <p:nvPr/>
+        </p:nvSpPr>
+        <p:spPr>
+          <a:xfrm>
+            <a:off x="822960" y="2057400"/>
+            <a:ext cx="9814255" cy="4023360"/>
           </a:xfrm>
           <a:prstGeom prst="rect">
             <a:avLst/>
@@ -6808,272 +7379,65 @@
           <a:p>
             <a:pPr indent="0" marL="0">
               <a:lnSpc>
-                <a:spcPct val="105000"/>
+                <a:spcPct val="110000"/>
               </a:lnSpc>
-              <a:buNone/>
-            </a:pPr>
-            <a:r>
-              <a:rPr lang="en-US" sz="2200" dirty="0">
+              <a:spcAft>
+                <a:spcPts val="1400"/>
+              </a:spcAft>
+              <a:buNone/>
+            </a:pPr>
+            <a:r>
+              <a:rPr lang="en-US" sz="2800" dirty="0">
                 <a:solidFill>
                   <a:srgbClr val="F2F0EA"/>
                 </a:solidFill>
-                <a:latin typeface="Arial" pitchFamily="34" charset="0"/>
-                <a:ea typeface="Arial" pitchFamily="34" charset="-122"/>
-                <a:cs typeface="Arial" pitchFamily="34" charset="-120"/>
-              </a:rPr>
-              <a:t>Para classificar a modalidade, pergunta o que faz quem fala: mede a certeza, obriga ou pede, avalia; a marca é um advérbio, um verbo modal, um modo ou uma exclamação.</a:t>
-            </a:r>
-            <a:endParaRPr lang="en-US" sz="2200" dirty="0"/>
-          </a:p>
-        </p:txBody>
-      </p:sp>
-      <p:sp>
-        <p:nvSpPr>
-          <p:cNvPr id="14" name="Shape 11"/>
-          <p:cNvSpPr/>
-          <p:nvPr/>
-        </p:nvSpPr>
-        <p:spPr>
-          <a:xfrm>
-            <a:off x="822960" y="3326892"/>
-            <a:ext cx="365760" cy="365760"/>
-          </a:xfrm>
-          <a:prstGeom prst="ellipse">
-            <a:avLst/>
-          </a:prstGeom>
-          <a:solidFill>
-            <a:srgbClr val="111111"/>
-          </a:solidFill>
-          <a:ln w="15875">
-            <a:solidFill>
-              <a:srgbClr val="F2F0EA"/>
-            </a:solidFill>
-            <a:prstDash val="solid"/>
-          </a:ln>
-        </p:spPr>
-      </p:sp>
-      <p:sp>
-        <p:nvSpPr>
-          <p:cNvPr id="15" name="Text 12"/>
-          <p:cNvSpPr/>
-          <p:nvPr/>
-        </p:nvSpPr>
-        <p:spPr>
-          <a:xfrm>
-            <a:off x="822960" y="3326892"/>
-            <a:ext cx="365760" cy="365760"/>
-          </a:xfrm>
-          <a:prstGeom prst="rect">
-            <a:avLst/>
-          </a:prstGeom>
-          <a:noFill/>
-          <a:ln/>
-        </p:spPr>
-        <p:txBody>
-          <a:bodyPr wrap="square" lIns="0" tIns="0" rIns="0" bIns="0" rtlCol="0" anchor="ctr"/>
-          <a:lstStyle/>
-          <a:p>
-            <a:pPr algn="ctr" indent="0" marL="0">
-              <a:buNone/>
-            </a:pPr>
-            <a:r>
-              <a:rPr lang="en-US" sz="1300" b="1" dirty="0">
-                <a:solidFill>
-                  <a:srgbClr val="F2F0EA"/>
-                </a:solidFill>
-                <a:latin typeface="Arial" pitchFamily="34" charset="0"/>
-                <a:ea typeface="Arial" pitchFamily="34" charset="-122"/>
-                <a:cs typeface="Arial" pitchFamily="34" charset="-120"/>
-              </a:rPr>
-              <a:t>2</a:t>
-            </a:r>
-            <a:endParaRPr lang="en-US" sz="1300" dirty="0"/>
-          </a:p>
-        </p:txBody>
-      </p:sp>
-      <p:sp>
-        <p:nvSpPr>
-          <p:cNvPr id="16" name="Text 13"/>
-          <p:cNvSpPr/>
-          <p:nvPr/>
-        </p:nvSpPr>
-        <p:spPr>
-          <a:xfrm>
-            <a:off x="1417320" y="3336036"/>
-            <a:ext cx="9174175" cy="1564640"/>
-          </a:xfrm>
-          <a:prstGeom prst="rect">
-            <a:avLst/>
-          </a:prstGeom>
-          <a:noFill/>
-          <a:ln/>
-        </p:spPr>
-        <p:txBody>
-          <a:bodyPr wrap="square" lIns="0" tIns="0" rIns="0" bIns="0" rtlCol="0" anchor="t">
-            <a:normAutofit/>
-          </a:bodyPr>
-          <a:lstStyle/>
-          <a:p>
+                <a:latin typeface="Georgia" pitchFamily="34" charset="0"/>
+                <a:ea typeface="Georgia" pitchFamily="34" charset="-122"/>
+                <a:cs typeface="Georgia" pitchFamily="34" charset="-120"/>
+              </a:rPr>
+              <a:t>Em 2019, o cabo-verdiano José Luiz Tavares publica </a:t>
+            </a:r>
             <a:pPr indent="0" marL="0">
               <a:lnSpc>
-                <a:spcPct val="105000"/>
+                <a:spcPct val="110000"/>
               </a:lnSpc>
-              <a:buNone/>
-            </a:pPr>
-            <a:r>
-              <a:rPr lang="en-US" sz="2200" dirty="0">
+              <a:spcAft>
+                <a:spcPts val="1400"/>
+              </a:spcAft>
+              <a:buNone/>
+            </a:pPr>
+            <a:r>
+              <a:rPr lang="en-US" sz="2800" i="1" dirty="0">
                 <a:solidFill>
                   <a:srgbClr val="F2F0EA"/>
                 </a:solidFill>
-                <a:latin typeface="Arial" pitchFamily="34" charset="0"/>
-                <a:ea typeface="Arial" pitchFamily="34" charset="-122"/>
-                <a:cs typeface="Arial" pitchFamily="34" charset="-120"/>
-              </a:rPr>
-              <a:t>Um verbo conjugado, uma oração: «quem não sabe arte» é substantiva relativa e sujeito; «Que já coberto foi de neve fria» é adjetiva relativa explicativa; «servia a ela» é coordenada adversativa.</a:t>
-            </a:r>
-            <a:endParaRPr lang="en-US" sz="2200" dirty="0"/>
-          </a:p>
-        </p:txBody>
-      </p:sp>
-      <p:sp>
-        <p:nvSpPr>
-          <p:cNvPr id="17" name="Shape 14"/>
-          <p:cNvSpPr/>
-          <p:nvPr/>
-        </p:nvSpPr>
-        <p:spPr>
-          <a:xfrm>
-            <a:off x="822960" y="4891532"/>
-            <a:ext cx="365760" cy="365760"/>
-          </a:xfrm>
-          <a:prstGeom prst="ellipse">
-            <a:avLst/>
-          </a:prstGeom>
-          <a:solidFill>
-            <a:srgbClr val="111111"/>
-          </a:solidFill>
-          <a:ln w="15875">
-            <a:solidFill>
-              <a:srgbClr val="F2F0EA"/>
-            </a:solidFill>
-            <a:prstDash val="solid"/>
-          </a:ln>
-        </p:spPr>
-      </p:sp>
-      <p:sp>
-        <p:nvSpPr>
-          <p:cNvPr id="18" name="Text 15"/>
-          <p:cNvSpPr/>
-          <p:nvPr/>
-        </p:nvSpPr>
-        <p:spPr>
-          <a:xfrm>
-            <a:off x="822960" y="4891532"/>
-            <a:ext cx="365760" cy="365760"/>
-          </a:xfrm>
-          <a:prstGeom prst="rect">
-            <a:avLst/>
-          </a:prstGeom>
-          <a:noFill/>
-          <a:ln/>
-        </p:spPr>
-        <p:txBody>
-          <a:bodyPr wrap="square" lIns="0" tIns="0" rIns="0" bIns="0" rtlCol="0" anchor="ctr"/>
-          <a:lstStyle/>
-          <a:p>
-            <a:pPr algn="ctr" indent="0" marL="0">
-              <a:buNone/>
-            </a:pPr>
-            <a:r>
-              <a:rPr lang="en-US" sz="1300" b="1" dirty="0">
-                <a:solidFill>
-                  <a:srgbClr val="F2F0EA"/>
-                </a:solidFill>
-                <a:latin typeface="Arial" pitchFamily="34" charset="0"/>
-                <a:ea typeface="Arial" pitchFamily="34" charset="-122"/>
-                <a:cs typeface="Arial" pitchFamily="34" charset="-120"/>
-              </a:rPr>
-              <a:t>3</a:t>
-            </a:r>
-            <a:endParaRPr lang="en-US" sz="1300" dirty="0"/>
-          </a:p>
-        </p:txBody>
-      </p:sp>
-      <p:sp>
-        <p:nvSpPr>
-          <p:cNvPr id="19" name="Text 16"/>
-          <p:cNvSpPr/>
-          <p:nvPr/>
-        </p:nvSpPr>
-        <p:spPr>
-          <a:xfrm>
-            <a:off x="1417320" y="4900676"/>
-            <a:ext cx="9174175" cy="1223772"/>
-          </a:xfrm>
-          <a:prstGeom prst="rect">
-            <a:avLst/>
-          </a:prstGeom>
-          <a:noFill/>
-          <a:ln/>
-        </p:spPr>
-        <p:txBody>
-          <a:bodyPr wrap="square" lIns="0" tIns="0" rIns="0" bIns="0" rtlCol="0" anchor="t">
-            <a:normAutofit/>
-          </a:bodyPr>
-          <a:lstStyle/>
-          <a:p>
+                <a:latin typeface="Georgia" pitchFamily="34" charset="0"/>
+                <a:ea typeface="Georgia" pitchFamily="34" charset="-122"/>
+                <a:cs typeface="Georgia" pitchFamily="34" charset="-120"/>
+              </a:rPr>
+              <a:t>Ku Ki Vos</a:t>
+            </a:r>
             <a:pPr indent="0" marL="0">
               <a:lnSpc>
-                <a:spcPct val="105000"/>
+                <a:spcPct val="110000"/>
               </a:lnSpc>
-              <a:buNone/>
-            </a:pPr>
-            <a:r>
-              <a:rPr lang="en-US" sz="2200" dirty="0">
+              <a:spcAft>
+                <a:spcPts val="1400"/>
+              </a:spcAft>
+              <a:buNone/>
+            </a:pPr>
+            <a:r>
+              <a:rPr lang="en-US" sz="2800" dirty="0">
                 <a:solidFill>
                   <a:srgbClr val="F2F0EA"/>
                 </a:solidFill>
-                <a:latin typeface="Arial" pitchFamily="34" charset="0"/>
-                <a:ea typeface="Arial" pitchFamily="34" charset="-122"/>
-                <a:cs typeface="Arial" pitchFamily="34" charset="-120"/>
-              </a:rPr>
-              <a:t>«Este», «nela», «ali» e «desta ilha» retomam o que veio antes; «cheio» e «pleno», do mesmo </a:t>
-            </a:r>
-            <a:pPr indent="0" marL="0">
-              <a:lnSpc>
-                <a:spcPct val="105000"/>
-              </a:lnSpc>
-              <a:buNone/>
-            </a:pPr>
-            <a:r>
-              <a:rPr lang="en-US" sz="2200" i="1" dirty="0">
-                <a:solidFill>
-                  <a:srgbClr val="F2F0EA"/>
-                </a:solidFill>
-                <a:latin typeface="Arial" pitchFamily="34" charset="0"/>
-                <a:ea typeface="Arial" pitchFamily="34" charset="-122"/>
-                <a:cs typeface="Arial" pitchFamily="34" charset="-120"/>
-              </a:rPr>
-              <a:t>plenu-</a:t>
-            </a:r>
-            <a:pPr indent="0" marL="0">
-              <a:lnSpc>
-                <a:spcPct val="105000"/>
-              </a:lnSpc>
-              <a:buNone/>
-            </a:pPr>
-            <a:r>
-              <a:rPr lang="en-US" sz="2200" dirty="0">
-                <a:solidFill>
-                  <a:srgbClr val="F2F0EA"/>
-                </a:solidFill>
-                <a:latin typeface="Arial" pitchFamily="34" charset="0"/>
-                <a:ea typeface="Arial" pitchFamily="34" charset="-122"/>
-                <a:cs typeface="Arial" pitchFamily="34" charset="-120"/>
-              </a:rPr>
-              <a:t>, mostram as duas vias por onde o latim chegou ao português.</a:t>
-            </a:r>
-            <a:endParaRPr lang="en-US" sz="2200" dirty="0"/>
+                <a:latin typeface="Georgia" pitchFamily="34" charset="0"/>
+                <a:ea typeface="Georgia" pitchFamily="34" charset="-122"/>
+                <a:cs typeface="Georgia" pitchFamily="34" charset="-120"/>
+              </a:rPr>
+              <a:t> (Com que voz): 65 sonetos de Camões em crioulo, entre eles «Mudam-se os tempos».</a:t>
+            </a:r>
+            <a:endParaRPr lang="en-US" sz="2800" dirty="0"/>
           </a:p>
         </p:txBody>
       </p:sp>

--- a/m3/diapositivos/sessao-07-m3-f15.pptx
+++ b/m3/diapositivos/sessao-07-m3-f15.pptx
@@ -7323,7 +7323,7 @@
                 <a:ea typeface="Arial" pitchFamily="34" charset="-122"/>
                 <a:cs typeface="Arial" pitchFamily="34" charset="-120"/>
               </a:rPr>
-              <a:t>José Luiz Tavares, Cabo Verde</a:t>
+              <a:t>Carlos Drummond de Andrade, Brasil</a:t>
             </a:r>
             <a:endParaRPr lang="en-US" sz="3400" dirty="0"/>
           </a:p>
@@ -7395,7 +7395,7 @@
                 <a:ea typeface="Georgia" pitchFamily="34" charset="-122"/>
                 <a:cs typeface="Georgia" pitchFamily="34" charset="-120"/>
               </a:rPr>
-              <a:t>Em 2019, o cabo-verdiano José Luiz Tavares publica </a:t>
+              <a:t>Em </a:t>
             </a:r>
             <a:pPr indent="0" marL="0">
               <a:lnSpc>
@@ -7415,7 +7415,7 @@
                 <a:ea typeface="Georgia" pitchFamily="34" charset="-122"/>
                 <a:cs typeface="Georgia" pitchFamily="34" charset="-120"/>
               </a:rPr>
-              <a:t>Ku Ki Vos</a:t>
+              <a:t>Claro Enigma</a:t>
             </a:r>
             <a:pPr indent="0" marL="0">
               <a:lnSpc>
@@ -7435,7 +7435,7 @@
                 <a:ea typeface="Georgia" pitchFamily="34" charset="-122"/>
                 <a:cs typeface="Georgia" pitchFamily="34" charset="-120"/>
               </a:rPr>
-              <a:t> (Com que voz): 65 sonetos de Camões em crioulo, entre eles «Mudam-se os tempos».</a:t>
+              <a:t> (1951), Drummond publica «A Máquina do Mundo»: o título evoca o canto X, onde Tétis mostra ao Gama o globo do mundo.</a:t>
             </a:r>
             <a:endParaRPr lang="en-US" sz="2800" dirty="0"/>
           </a:p>
